--- a/Week02_ArraysAndMethods.pptx
+++ b/Week02_ArraysAndMethods.pptx
@@ -4393,8 +4393,8 @@
         </p:nvSpPr>
         <p:spPr>
           <a:xfrm>
-            <a:off x="731520" y="365760"/>
-            <a:ext cx="2743200" cy="548640"/>
+            <a:off x="731520" y="228600"/>
+            <a:ext cx="1828800" cy="502920"/>
           </a:xfrm>
           <a:prstGeom prst="rect">
             <a:avLst/>
@@ -4408,7 +4408,7 @@
           <a:lstStyle/>
           <a:p>
             <a:pPr>
-              <a:defRPr sz="2800" b="1">
+              <a:defRPr sz="2600" b="1">
                 <a:solidFill>
                   <a:srgbClr val="0EA5E9"/>
                 </a:solidFill>
@@ -4429,8 +4429,8 @@
         </p:nvSpPr>
         <p:spPr>
           <a:xfrm>
-            <a:off x="731520" y="1097280"/>
-            <a:ext cx="7680960" cy="3657600"/>
+            <a:off x="731520" y="713232"/>
+            <a:ext cx="5486400" cy="320040"/>
           </a:xfrm>
           <a:prstGeom prst="rect">
             <a:avLst/>
@@ -4438,6 +4438,42 @@
           <a:noFill/>
         </p:spPr>
         <p:txBody>
+          <a:bodyPr wrap="none">
+            <a:spAutoFit/>
+          </a:bodyPr>
+          <a:lstStyle/>
+          <a:p>
+            <a:pPr>
+              <a:defRPr sz="1300">
+                <a:solidFill>
+                  <a:srgbClr val="CADCFC"/>
+                </a:solidFill>
+                <a:latin typeface="Calibri"/>
+              </a:defRPr>
+            </a:pPr>
+            <a:r>
+              <a:t>Week 02 — 다음 질문에 답해 보세요</a:t>
+            </a:r>
+          </a:p>
+        </p:txBody>
+      </p:sp>
+      <p:sp>
+        <p:nvSpPr>
+          <p:cNvPr id="6" name="TextBox 5"/>
+          <p:cNvSpPr txBox="1"/>
+          <p:nvPr/>
+        </p:nvSpPr>
+        <p:spPr>
+          <a:xfrm>
+            <a:off x="731520" y="1115568"/>
+            <a:ext cx="5029200" cy="3474720"/>
+          </a:xfrm>
+          <a:prstGeom prst="rect">
+            <a:avLst/>
+          </a:prstGeom>
+          <a:noFill/>
+        </p:spPr>
+        <p:txBody>
           <a:bodyPr wrap="square">
             <a:spAutoFit/>
           </a:bodyPr>
@@ -4445,9 +4481,9 @@
           <a:p>
             <a:pPr>
               <a:spcAft>
-                <a:spcPts val="1400"/>
-              </a:spcAft>
-              <a:defRPr sz="1600">
+                <a:spcPts val="1000"/>
+              </a:spcAft>
+              <a:defRPr sz="1400">
                 <a:solidFill>
                   <a:srgbClr val="FFFFFF"/>
                 </a:solidFill>
@@ -4455,15 +4491,15 @@
               </a:defRPr>
             </a:pPr>
             <a:r>
-              <a:t>Q1. 배열을 for 루프로 모두 순회할 때 조건식은?</a:t>
+              <a:t>Q1. `scores`를 그냥 출력했을 때 값 목록이 안 보이는 이유는 무엇인가?</a:t>
             </a:r>
           </a:p>
           <a:p>
             <a:pPr>
               <a:spcAft>
-                <a:spcPts val="1400"/>
-              </a:spcAft>
-              <a:defRPr sz="1600">
+                <a:spcPts val="1000"/>
+              </a:spcAft>
+              <a:defRPr sz="1400">
                 <a:solidFill>
                   <a:srgbClr val="FFFFFF"/>
                 </a:solidFill>
@@ -4471,15 +4507,15 @@
               </a:defRPr>
             </a:pPr>
             <a:r>
-              <a:t>Q2. int[] arr = {1,2,3}; arr[3]에 접근하면 어떻게 될까?</a:t>
+              <a:t>Q2. `sum(int... numbers)`에서 `numbers`는 메서드 안에서 어떤 형태로 다뤄지는가?</a:t>
             </a:r>
           </a:p>
           <a:p>
             <a:pPr>
               <a:spcAft>
-                <a:spcPts val="1400"/>
-              </a:spcAft>
-              <a:defRPr sz="1600">
+                <a:spcPts val="1000"/>
+              </a:spcAft>
+              <a:defRPr sz="1400">
                 <a:solidFill>
                   <a:srgbClr val="FFFFFF"/>
                 </a:solidFill>
@@ -4487,15 +4523,15 @@
               </a:defRPr>
             </a:pPr>
             <a:r>
-              <a:t>Q3. 메서드의 매개변수로 배열을 받으면 값이 복사되나?</a:t>
+              <a:t>Q3. `sortArray(data)` 호출 후 `data`가 바뀌는 이유는 무엇인가?</a:t>
             </a:r>
           </a:p>
           <a:p>
             <a:pPr>
               <a:spcAft>
-                <a:spcPts val="1400"/>
-              </a:spcAft>
-              <a:defRPr sz="1600">
+                <a:spcPts val="1000"/>
+              </a:spcAft>
+              <a:defRPr sz="1400">
                 <a:solidFill>
                   <a:srgbClr val="FFFFFF"/>
                 </a:solidFill>
@@ -4503,7 +4539,173 @@
               </a:defRPr>
             </a:pPr>
             <a:r>
-              <a:t>Q4. Bubble Sort의 시간 복잡도는 O(?)?</a:t>
+              <a:t>Q4. 버블 정렬에서 안쪽 반복문 범위가 `arr.length - i - 1`인 이유는 무엇인가?</a:t>
+            </a:r>
+          </a:p>
+        </p:txBody>
+      </p:sp>
+      <p:sp>
+        <p:nvSpPr>
+          <p:cNvPr id="7" name="Rectangle 6"/>
+          <p:cNvSpPr/>
+          <p:nvPr/>
+        </p:nvSpPr>
+        <p:spPr>
+          <a:xfrm>
+            <a:off x="5943600" y="1115568"/>
+            <a:ext cx="27432" cy="3474720"/>
+          </a:xfrm>
+          <a:prstGeom prst="rect">
+            <a:avLst/>
+          </a:prstGeom>
+          <a:solidFill>
+            <a:srgbClr val="3B527E"/>
+          </a:solidFill>
+          <a:ln>
+            <a:noFill/>
+          </a:ln>
+        </p:spPr>
+        <p:style>
+          <a:lnRef idx="1">
+            <a:schemeClr val="accent1"/>
+          </a:lnRef>
+          <a:fillRef idx="3">
+            <a:schemeClr val="accent1"/>
+          </a:fillRef>
+          <a:effectRef idx="2">
+            <a:schemeClr val="accent1"/>
+          </a:effectRef>
+          <a:fontRef idx="minor">
+            <a:schemeClr val="lt1"/>
+          </a:fontRef>
+        </p:style>
+        <p:txBody>
+          <a:bodyPr rtlCol="0" anchor="ctr"/>
+          <a:lstStyle/>
+          <a:p>
+            <a:pPr algn="ctr"/>
+          </a:p>
+        </p:txBody>
+      </p:sp>
+      <p:sp>
+        <p:nvSpPr>
+          <p:cNvPr id="8" name="TextBox 7"/>
+          <p:cNvSpPr txBox="1"/>
+          <p:nvPr/>
+        </p:nvSpPr>
+        <p:spPr>
+          <a:xfrm>
+            <a:off x="6080760" y="1115568"/>
+            <a:ext cx="2834640" cy="365760"/>
+          </a:xfrm>
+          <a:prstGeom prst="rect">
+            <a:avLst/>
+          </a:prstGeom>
+          <a:noFill/>
+        </p:spPr>
+        <p:txBody>
+          <a:bodyPr wrap="none">
+            <a:spAutoFit/>
+          </a:bodyPr>
+          <a:lstStyle/>
+          <a:p>
+            <a:pPr>
+              <a:defRPr sz="1400" b="1">
+                <a:solidFill>
+                  <a:srgbClr val="0EA5E9"/>
+                </a:solidFill>
+                <a:latin typeface="Georgia"/>
+              </a:defRPr>
+            </a:pPr>
+            <a:r>
+              <a:t>추가 실습</a:t>
+            </a:r>
+          </a:p>
+        </p:txBody>
+      </p:sp>
+      <p:sp>
+        <p:nvSpPr>
+          <p:cNvPr id="9" name="TextBox 8"/>
+          <p:cNvSpPr txBox="1"/>
+          <p:nvPr/>
+        </p:nvSpPr>
+        <p:spPr>
+          <a:xfrm>
+            <a:off x="6080760" y="1499616"/>
+            <a:ext cx="2834640" cy="3108960"/>
+          </a:xfrm>
+          <a:prstGeom prst="rect">
+            <a:avLst/>
+          </a:prstGeom>
+          <a:noFill/>
+        </p:spPr>
+        <p:txBody>
+          <a:bodyPr wrap="square">
+            <a:spAutoFit/>
+          </a:bodyPr>
+          <a:lstStyle/>
+          <a:p>
+            <a:pPr>
+              <a:spcAft>
+                <a:spcPts val="800"/>
+              </a:spcAft>
+              <a:defRPr sz="1200">
+                <a:solidFill>
+                  <a:srgbClr val="CADCFC"/>
+                </a:solidFill>
+                <a:latin typeface="Calibri"/>
+              </a:defRPr>
+            </a:pPr>
+            <a:r>
+              <a:t>① ex01을 바꿔서 합계와 평균까지 함께 출력하기</a:t>
+            </a:r>
+          </a:p>
+          <a:p>
+            <a:pPr>
+              <a:spcAft>
+                <a:spcPts val="800"/>
+              </a:spcAft>
+              <a:defRPr sz="1200">
+                <a:solidFill>
+                  <a:srgbClr val="CADCFC"/>
+                </a:solidFill>
+                <a:latin typeface="Calibri"/>
+              </a:defRPr>
+            </a:pPr>
+            <a:r>
+              <a:t>② ex02에 `max(int... numbers)` 메서드 추가하기</a:t>
+            </a:r>
+          </a:p>
+          <a:p>
+            <a:pPr>
+              <a:spcAft>
+                <a:spcPts val="800"/>
+              </a:spcAft>
+              <a:defRPr sz="1200">
+                <a:solidFill>
+                  <a:srgbClr val="CADCFC"/>
+                </a:solidFill>
+                <a:latin typeface="Calibri"/>
+              </a:defRPr>
+            </a:pPr>
+            <a:r>
+              <a:t>③ ex03을 내림차순 정렬로 바꾸기</a:t>
+            </a:r>
+          </a:p>
+          <a:p>
+            <a:pPr>
+              <a:spcAft>
+                <a:spcPts val="800"/>
+              </a:spcAft>
+              <a:defRPr sz="1200">
+                <a:solidFill>
+                  <a:srgbClr val="CADCFC"/>
+                </a:solidFill>
+                <a:latin typeface="Calibri"/>
+              </a:defRPr>
+            </a:pPr>
+            <a:r>
+              <a:t>④ ex03에서 비교가 한 번도 일어나지 않으면 조기 종료하도록 개선하기</a:t>
             </a:r>
           </a:p>
         </p:txBody>
